--- a/decks/hist-plantagenets/hist-plantagenets_ch3_church-and-crown.pptx
+++ b/decks/hist-plantagenets/hist-plantagenets_ch3_church-and-crown.pptx
@@ -125,29 +125,29 @@
   <p:extLst>
     <p:ext uri="{521415D9-36F7-43E2-AB2F-B90AF26B5E84}">
       <p14:sectionLst xmlns:p14="http://schemas.microsoft.com/office/powerpoint/2010/main">
-        <p14:section name="Opening" id="{09700276-3ac9-5b83-74dd-601e42b76ba4}">
+        <p14:section name="Opening" id="{fd915bfb-fede-b524-75c7-b30c1790772e}">
           <p14:sldIdLst>
             <p14:sldId id="256"/>
           </p14:sldIdLst>
         </p14:section>
-        <p14:section name="Gate" id="{03e08606-5433-fa53-f221-dedf5b296a9c}">
+        <p14:section name="Gate" id="{8003e95f-8304-0da0-8828-702e81154600}">
           <p14:sldIdLst>
             <p14:sldId id="257"/>
             <p14:sldId id="258"/>
           </p14:sldIdLst>
         </p14:section>
-        <p14:section name="Pre-teach" id="{4cdf0fc7-db1c-f9fd-345a-e1a4afb4bd82}">
+        <p14:section name="Pre-teach" id="{b5acb780-7b90-7acd-3826-16ff30cd2212}">
           <p14:sldIdLst>
             <p14:sldId id="259"/>
           </p14:sldIdLst>
         </p14:section>
-        <p14:section name="Read-along" id="{0ec2f341-1a2e-8dae-449e-4d4c1f5f27f3}">
+        <p14:section name="Read-along" id="{2447338b-386f-7647-7390-339d804a813a}">
           <p14:sldIdLst>
             <p14:sldId id="260"/>
             <p14:sldId id="261"/>
           </p14:sldIdLst>
         </p14:section>
-        <p14:section name="Teach" id="{47d16f70-2d20-d12c-cec6-8c39109e57c9}">
+        <p14:section name="Teach" id="{4803d31c-f2d9-13e2-43c0-3d20012074ab}">
           <p14:sldIdLst>
             <p14:sldId id="262"/>
             <p14:sldId id="263"/>
@@ -156,7 +156,7 @@
             <p14:sldId id="266"/>
           </p14:sldIdLst>
         </p14:section>
-        <p14:section name="Routes" id="{265ff519-5315-1187-739e-30bdfb2c8df2}">
+        <p14:section name="Routes" id="{276731dc-7a16-883d-dce3-204b882d4bfe}">
           <p14:sldIdLst>
             <p14:sldId id="267"/>
             <p14:sldId id="268"/>
@@ -164,12 +164,12 @@
             <p14:sldId id="270"/>
           </p14:sldIdLst>
         </p14:section>
-        <p14:section name="Close" id="{981b75e0-baf7-6f39-cffa-cf6895043006}">
+        <p14:section name="Close" id="{523c0393-ae57-d7d5-e099-39c079461de3}">
           <p14:sldIdLst>
             <p14:sldId id="271"/>
           </p14:sldIdLst>
         </p14:section>
-        <p14:section name="Answers" id="{db124795-a01f-cb16-c19e-faafefd042d6}">
+        <p14:section name="Answers" id="{f8455da3-fd6e-7fde-0e4f-b014ebda8143}">
           <p14:sldIdLst>
             <p14:sldId id="272"/>
             <p14:sldId id="273"/>
@@ -2165,7 +2165,7 @@
             <a:r>
               <a:rPr lang="en-US" dirty="0"/>
               <a:t>Teach — Best friends: Henry and Becket. Say it in your own words, then check understanding with a quick question: ask a pupil from the pre-teach group first, since they met these words and ideas before the lesson. Pupils try to recall before you re-explain.
-It is 1154, and Henry II has become King of England. He is the great-grandson of William the Conqueror through William's granddaughter Matilda, and the first Plantagenet king. He is popular, but he has a very short temper: when he is angry, his eyes go bloodshot and he flies into a rage.
+It is 1154, and Henry II has become King of England. He is William the Conqueror's great-grandson — the line runs through Matilda, the Conqueror's granddaughter — and he is the first Plantagenet king. He is popular, but he has a very short temper: when he is angry, his eyes go bloodshot and he flies into a rage.
 One of Henry's best friends is Thomas Becket. They hunt together and feast together, and both love expensive food and wine. Henry trusts Thomas so much that he makes him Chancellor, the person in charge of the country when the king is away. Then Henry goes further and makes his friend Archbishop of Canterbury, the head of the Church in England. He expects an Archbishop who will do what the king wants.
 That is not what he gets. Becket becomes very religious and starts to put the Church before the king. Henry believes the Church courts are too soft on priests who break the law, and he wants to punish them himself. Becket refuses to let him. In 1164 Becket agrees to change the rules of the Church courts, then changes his mind. Henry is furious, and Becket runs away to France. He stays there for six years.
 Worked example — model it step by step, thinking aloud: Becket fled to France in 1164 and returned in 1170. Check the chapter's claim that he was away for six years. (1) Find the two dates: he left in 1164 and came back in 1170. (2) Later year minus earlier year: 1170 − 1164. (3) 1170 − 1164 = 6. The claim is right: six years. (4) This is also a good check on your lesson, which says both six years and the dates 1164 and 1170. The three numbers agree. Answer: Six years.
@@ -2258,7 +2258,7 @@
             <a:r>
               <a:rPr lang="en-US" dirty="0"/>
               <a:t>Teach — Best friends: Henry and Becket. Say it in your own words, then check understanding with a quick question: ask a pupil from the pre-teach group first, since they met these words and ideas before the lesson. Pupils try to recall before you re-explain.
-It is 1154, and Henry II has become King of England. He is the great-grandson of William the Conqueror through William's granddaughter Matilda, and the first Plantagenet king. He is popular, but he has a very short temper: when he is angry, his eyes go bloodshot and he flies into a rage.
+It is 1154, and Henry II has become King of England. He is William the Conqueror's great-grandson — the line runs through Matilda, the Conqueror's granddaughter — and he is the first Plantagenet king. He is popular, but he has a very short temper: when he is angry, his eyes go bloodshot and he flies into a rage.
 One of Henry's best friends is Thomas Becket. They hunt together and feast together, and both love expensive food and wine. Henry trusts Thomas so much that he makes him Chancellor, the person in charge of the country when the king is away. Then Henry goes further and makes his friend Archbishop of Canterbury, the head of the Church in England. He expects an Archbishop who will do what the king wants.
 That is not what he gets. Becket becomes very religious and starts to put the Church before the king. Henry believes the Church courts are too soft on priests who break the law, and he wants to punish them himself. Becket refuses to let him. In 1164 Becket agrees to change the rules of the Church courts, then changes his mind. Henry is furious, and Becket runs away to France. He stays there for six years.
 Worked example — model it step by step, thinking aloud: Becket fled to France in 1164 and returned in 1170. Check the chapter's claim that he was away for six years. (1) Find the two dates: he left in 1164 and came back in 1170. (2) Later year minus earlier year: 1170 − 1164. (3) 1170 − 1164 = 6. The claim is right: six years. (4) This is also a good check on your lesson, which says both six years and the dates 1164 and 1170. The three numbers agree. Answer: Six years.
